--- a/GPP_ZombieAI_DelieWout_2DAE19.pptx
+++ b/GPP_ZombieAI_DelieWout_2DAE19.pptx
@@ -4,6 +4,9 @@
   <p:sldMasterIdLst>
     <p:sldMasterId id="2147483648" r:id="rId4"/>
   </p:sldMasterIdLst>
+  <p:notesMasterIdLst>
+    <p:notesMasterId r:id="rId12"/>
+  </p:notesMasterIdLst>
   <p:sldIdLst>
     <p:sldId id="256" r:id="rId5"/>
     <p:sldId id="257" r:id="rId6"/>
@@ -256,6 +259,440 @@
 </pc:chgInfo>
 </file>
 
+<file path=ppt/notesMasters/notesMaster1.xml><?xml version="1.0" encoding="utf-8"?>
+<p:notesMaster xmlns:a="http://schemas.openxmlformats.org/drawingml/2006/main" xmlns:r="http://schemas.openxmlformats.org/officeDocument/2006/relationships" xmlns:p="http://schemas.openxmlformats.org/presentationml/2006/main">
+  <p:cSld>
+    <p:bg>
+      <p:bgRef idx="1001">
+        <a:schemeClr val="bg1"/>
+      </p:bgRef>
+    </p:bg>
+    <p:spTree>
+      <p:nvGrpSpPr>
+        <p:cNvPr id="1" name=""/>
+        <p:cNvGrpSpPr/>
+        <p:nvPr/>
+      </p:nvGrpSpPr>
+      <p:grpSpPr>
+        <a:xfrm>
+          <a:off x="0" y="0"/>
+          <a:ext cx="0" cy="0"/>
+          <a:chOff x="0" y="0"/>
+          <a:chExt cx="0" cy="0"/>
+        </a:xfrm>
+      </p:grpSpPr>
+      <p:sp>
+        <p:nvSpPr>
+          <p:cNvPr id="2" name="Header Placeholder 1"/>
+          <p:cNvSpPr>
+            <a:spLocks noGrp="1"/>
+          </p:cNvSpPr>
+          <p:nvPr>
+            <p:ph type="hdr" sz="quarter"/>
+          </p:nvPr>
+        </p:nvSpPr>
+        <p:spPr>
+          <a:xfrm>
+            <a:off x="0" y="0"/>
+            <a:ext cx="2971800" cy="458788"/>
+          </a:xfrm>
+          <a:prstGeom prst="rect">
+            <a:avLst/>
+          </a:prstGeom>
+        </p:spPr>
+        <p:txBody>
+          <a:bodyPr vert="horz" lIns="91440" tIns="45720" rIns="91440" bIns="45720" rtlCol="0"/>
+          <a:lstStyle>
+            <a:lvl1pPr algn="l">
+              <a:defRPr sz="1200"/>
+            </a:lvl1pPr>
+          </a:lstStyle>
+          <a:p>
+            <a:endParaRPr lang="nl-NL"/>
+          </a:p>
+        </p:txBody>
+      </p:sp>
+      <p:sp>
+        <p:nvSpPr>
+          <p:cNvPr id="3" name="Date Placeholder 2"/>
+          <p:cNvSpPr>
+            <a:spLocks noGrp="1"/>
+          </p:cNvSpPr>
+          <p:nvPr>
+            <p:ph type="dt" idx="1"/>
+          </p:nvPr>
+        </p:nvSpPr>
+        <p:spPr>
+          <a:xfrm>
+            <a:off x="3884613" y="0"/>
+            <a:ext cx="2971800" cy="458788"/>
+          </a:xfrm>
+          <a:prstGeom prst="rect">
+            <a:avLst/>
+          </a:prstGeom>
+        </p:spPr>
+        <p:txBody>
+          <a:bodyPr vert="horz" lIns="91440" tIns="45720" rIns="91440" bIns="45720" rtlCol="0"/>
+          <a:lstStyle>
+            <a:lvl1pPr algn="r">
+              <a:defRPr sz="1200"/>
+            </a:lvl1pPr>
+          </a:lstStyle>
+          <a:p>
+            <a:fld id="{1F1FB3B3-0489-404C-8C64-E262249D8D8C}" type="datetimeFigureOut">
+              <a:rPr lang="nl-NL" smtClean="0"/>
+              <a:t>7-6-2026</a:t>
+            </a:fld>
+            <a:endParaRPr lang="nl-NL"/>
+          </a:p>
+        </p:txBody>
+      </p:sp>
+      <p:sp>
+        <p:nvSpPr>
+          <p:cNvPr id="4" name="Slide Image Placeholder 3"/>
+          <p:cNvSpPr>
+            <a:spLocks noGrp="1" noRot="1" noChangeAspect="1"/>
+          </p:cNvSpPr>
+          <p:nvPr>
+            <p:ph type="sldImg" idx="2"/>
+          </p:nvPr>
+        </p:nvSpPr>
+        <p:spPr>
+          <a:xfrm>
+            <a:off x="685800" y="1143000"/>
+            <a:ext cx="5486400" cy="3086100"/>
+          </a:xfrm>
+          <a:prstGeom prst="rect">
+            <a:avLst/>
+          </a:prstGeom>
+          <a:noFill/>
+          <a:ln w="12700">
+            <a:solidFill>
+              <a:prstClr val="black"/>
+            </a:solidFill>
+          </a:ln>
+        </p:spPr>
+        <p:txBody>
+          <a:bodyPr vert="horz" lIns="91440" tIns="45720" rIns="91440" bIns="45720" rtlCol="0" anchor="ctr"/>
+          <a:lstStyle/>
+          <a:p>
+            <a:endParaRPr lang="nl-NL"/>
+          </a:p>
+        </p:txBody>
+      </p:sp>
+      <p:sp>
+        <p:nvSpPr>
+          <p:cNvPr id="5" name="Notes Placeholder 4"/>
+          <p:cNvSpPr>
+            <a:spLocks noGrp="1"/>
+          </p:cNvSpPr>
+          <p:nvPr>
+            <p:ph type="body" sz="quarter" idx="3"/>
+          </p:nvPr>
+        </p:nvSpPr>
+        <p:spPr>
+          <a:xfrm>
+            <a:off x="685800" y="4400550"/>
+            <a:ext cx="5486400" cy="3600450"/>
+          </a:xfrm>
+          <a:prstGeom prst="rect">
+            <a:avLst/>
+          </a:prstGeom>
+        </p:spPr>
+        <p:txBody>
+          <a:bodyPr vert="horz" lIns="91440" tIns="45720" rIns="91440" bIns="45720" rtlCol="0"/>
+          <a:lstStyle/>
+          <a:p>
+            <a:pPr lvl="0"/>
+            <a:r>
+              <a:rPr lang="en-US"/>
+              <a:t>Click to edit Master text styles</a:t>
+            </a:r>
+          </a:p>
+          <a:p>
+            <a:pPr lvl="1"/>
+            <a:r>
+              <a:rPr lang="en-US"/>
+              <a:t>Second level</a:t>
+            </a:r>
+          </a:p>
+          <a:p>
+            <a:pPr lvl="2"/>
+            <a:r>
+              <a:rPr lang="en-US"/>
+              <a:t>Third level</a:t>
+            </a:r>
+          </a:p>
+          <a:p>
+            <a:pPr lvl="3"/>
+            <a:r>
+              <a:rPr lang="en-US"/>
+              <a:t>Fourth level</a:t>
+            </a:r>
+          </a:p>
+          <a:p>
+            <a:pPr lvl="4"/>
+            <a:r>
+              <a:rPr lang="en-US"/>
+              <a:t>Fifth level</a:t>
+            </a:r>
+            <a:endParaRPr lang="nl-NL"/>
+          </a:p>
+        </p:txBody>
+      </p:sp>
+      <p:sp>
+        <p:nvSpPr>
+          <p:cNvPr id="6" name="Footer Placeholder 5"/>
+          <p:cNvSpPr>
+            <a:spLocks noGrp="1"/>
+          </p:cNvSpPr>
+          <p:nvPr>
+            <p:ph type="ftr" sz="quarter" idx="4"/>
+          </p:nvPr>
+        </p:nvSpPr>
+        <p:spPr>
+          <a:xfrm>
+            <a:off x="0" y="8685213"/>
+            <a:ext cx="2971800" cy="458787"/>
+          </a:xfrm>
+          <a:prstGeom prst="rect">
+            <a:avLst/>
+          </a:prstGeom>
+        </p:spPr>
+        <p:txBody>
+          <a:bodyPr vert="horz" lIns="91440" tIns="45720" rIns="91440" bIns="45720" rtlCol="0" anchor="b"/>
+          <a:lstStyle>
+            <a:lvl1pPr algn="l">
+              <a:defRPr sz="1200"/>
+            </a:lvl1pPr>
+          </a:lstStyle>
+          <a:p>
+            <a:endParaRPr lang="nl-NL"/>
+          </a:p>
+        </p:txBody>
+      </p:sp>
+      <p:sp>
+        <p:nvSpPr>
+          <p:cNvPr id="7" name="Slide Number Placeholder 6"/>
+          <p:cNvSpPr>
+            <a:spLocks noGrp="1"/>
+          </p:cNvSpPr>
+          <p:nvPr>
+            <p:ph type="sldNum" sz="quarter" idx="5"/>
+          </p:nvPr>
+        </p:nvSpPr>
+        <p:spPr>
+          <a:xfrm>
+            <a:off x="3884613" y="8685213"/>
+            <a:ext cx="2971800" cy="458787"/>
+          </a:xfrm>
+          <a:prstGeom prst="rect">
+            <a:avLst/>
+          </a:prstGeom>
+        </p:spPr>
+        <p:txBody>
+          <a:bodyPr vert="horz" lIns="91440" tIns="45720" rIns="91440" bIns="45720" rtlCol="0" anchor="b"/>
+          <a:lstStyle>
+            <a:lvl1pPr algn="r">
+              <a:defRPr sz="1200"/>
+            </a:lvl1pPr>
+          </a:lstStyle>
+          <a:p>
+            <a:fld id="{E08F8B16-3854-42C5-AC11-311EC9D57CC1}" type="slidenum">
+              <a:rPr lang="nl-NL" smtClean="0"/>
+              <a:t>‹#›</a:t>
+            </a:fld>
+            <a:endParaRPr lang="nl-NL"/>
+          </a:p>
+        </p:txBody>
+      </p:sp>
+    </p:spTree>
+    <p:extLst>
+      <p:ext uri="{BB962C8B-B14F-4D97-AF65-F5344CB8AC3E}">
+        <p14:creationId xmlns:p14="http://schemas.microsoft.com/office/powerpoint/2010/main" val="821346680"/>
+      </p:ext>
+    </p:extLst>
+  </p:cSld>
+  <p:clrMap bg1="lt1" tx1="dk1" bg2="lt2" tx2="dk2" accent1="accent1" accent2="accent2" accent3="accent3" accent4="accent4" accent5="accent5" accent6="accent6" hlink="hlink" folHlink="folHlink"/>
+  <p:notesStyle>
+    <a:lvl1pPr marL="0" algn="l" defTabSz="914400" rtl="0" eaLnBrk="1" latinLnBrk="0" hangingPunct="1">
+      <a:defRPr sz="1200" kern="1200">
+        <a:solidFill>
+          <a:schemeClr val="tx1"/>
+        </a:solidFill>
+        <a:latin typeface="+mn-lt"/>
+        <a:ea typeface="+mn-ea"/>
+        <a:cs typeface="+mn-cs"/>
+      </a:defRPr>
+    </a:lvl1pPr>
+    <a:lvl2pPr marL="457200" algn="l" defTabSz="914400" rtl="0" eaLnBrk="1" latinLnBrk="0" hangingPunct="1">
+      <a:defRPr sz="1200" kern="1200">
+        <a:solidFill>
+          <a:schemeClr val="tx1"/>
+        </a:solidFill>
+        <a:latin typeface="+mn-lt"/>
+        <a:ea typeface="+mn-ea"/>
+        <a:cs typeface="+mn-cs"/>
+      </a:defRPr>
+    </a:lvl2pPr>
+    <a:lvl3pPr marL="914400" algn="l" defTabSz="914400" rtl="0" eaLnBrk="1" latinLnBrk="0" hangingPunct="1">
+      <a:defRPr sz="1200" kern="1200">
+        <a:solidFill>
+          <a:schemeClr val="tx1"/>
+        </a:solidFill>
+        <a:latin typeface="+mn-lt"/>
+        <a:ea typeface="+mn-ea"/>
+        <a:cs typeface="+mn-cs"/>
+      </a:defRPr>
+    </a:lvl3pPr>
+    <a:lvl4pPr marL="1371600" algn="l" defTabSz="914400" rtl="0" eaLnBrk="1" latinLnBrk="0" hangingPunct="1">
+      <a:defRPr sz="1200" kern="1200">
+        <a:solidFill>
+          <a:schemeClr val="tx1"/>
+        </a:solidFill>
+        <a:latin typeface="+mn-lt"/>
+        <a:ea typeface="+mn-ea"/>
+        <a:cs typeface="+mn-cs"/>
+      </a:defRPr>
+    </a:lvl4pPr>
+    <a:lvl5pPr marL="1828800" algn="l" defTabSz="914400" rtl="0" eaLnBrk="1" latinLnBrk="0" hangingPunct="1">
+      <a:defRPr sz="1200" kern="1200">
+        <a:solidFill>
+          <a:schemeClr val="tx1"/>
+        </a:solidFill>
+        <a:latin typeface="+mn-lt"/>
+        <a:ea typeface="+mn-ea"/>
+        <a:cs typeface="+mn-cs"/>
+      </a:defRPr>
+    </a:lvl5pPr>
+    <a:lvl6pPr marL="2286000" algn="l" defTabSz="914400" rtl="0" eaLnBrk="1" latinLnBrk="0" hangingPunct="1">
+      <a:defRPr sz="1200" kern="1200">
+        <a:solidFill>
+          <a:schemeClr val="tx1"/>
+        </a:solidFill>
+        <a:latin typeface="+mn-lt"/>
+        <a:ea typeface="+mn-ea"/>
+        <a:cs typeface="+mn-cs"/>
+      </a:defRPr>
+    </a:lvl6pPr>
+    <a:lvl7pPr marL="2743200" algn="l" defTabSz="914400" rtl="0" eaLnBrk="1" latinLnBrk="0" hangingPunct="1">
+      <a:defRPr sz="1200" kern="1200">
+        <a:solidFill>
+          <a:schemeClr val="tx1"/>
+        </a:solidFill>
+        <a:latin typeface="+mn-lt"/>
+        <a:ea typeface="+mn-ea"/>
+        <a:cs typeface="+mn-cs"/>
+      </a:defRPr>
+    </a:lvl7pPr>
+    <a:lvl8pPr marL="3200400" algn="l" defTabSz="914400" rtl="0" eaLnBrk="1" latinLnBrk="0" hangingPunct="1">
+      <a:defRPr sz="1200" kern="1200">
+        <a:solidFill>
+          <a:schemeClr val="tx1"/>
+        </a:solidFill>
+        <a:latin typeface="+mn-lt"/>
+        <a:ea typeface="+mn-ea"/>
+        <a:cs typeface="+mn-cs"/>
+      </a:defRPr>
+    </a:lvl8pPr>
+    <a:lvl9pPr marL="3657600" algn="l" defTabSz="914400" rtl="0" eaLnBrk="1" latinLnBrk="0" hangingPunct="1">
+      <a:defRPr sz="1200" kern="1200">
+        <a:solidFill>
+          <a:schemeClr val="tx1"/>
+        </a:solidFill>
+        <a:latin typeface="+mn-lt"/>
+        <a:ea typeface="+mn-ea"/>
+        <a:cs typeface="+mn-cs"/>
+      </a:defRPr>
+    </a:lvl9pPr>
+  </p:notesStyle>
+</p:notesMaster>
+</file>
+
+<file path=ppt/notesSlides/notesSlide1.xml><?xml version="1.0" encoding="utf-8"?>
+<p:notes xmlns:a="http://schemas.openxmlformats.org/drawingml/2006/main" xmlns:r="http://schemas.openxmlformats.org/officeDocument/2006/relationships" xmlns:p="http://schemas.openxmlformats.org/presentationml/2006/main">
+  <p:cSld>
+    <p:spTree>
+      <p:nvGrpSpPr>
+        <p:cNvPr id="1" name=""/>
+        <p:cNvGrpSpPr/>
+        <p:nvPr/>
+      </p:nvGrpSpPr>
+      <p:grpSpPr>
+        <a:xfrm>
+          <a:off x="0" y="0"/>
+          <a:ext cx="0" cy="0"/>
+          <a:chOff x="0" y="0"/>
+          <a:chExt cx="0" cy="0"/>
+        </a:xfrm>
+      </p:grpSpPr>
+      <p:sp>
+        <p:nvSpPr>
+          <p:cNvPr id="2" name="Slide Image Placeholder 1"/>
+          <p:cNvSpPr>
+            <a:spLocks noGrp="1" noRot="1" noChangeAspect="1"/>
+          </p:cNvSpPr>
+          <p:nvPr>
+            <p:ph type="sldImg"/>
+          </p:nvPr>
+        </p:nvSpPr>
+        <p:spPr/>
+      </p:sp>
+      <p:sp>
+        <p:nvSpPr>
+          <p:cNvPr id="3" name="Notes Placeholder 2"/>
+          <p:cNvSpPr>
+            <a:spLocks noGrp="1"/>
+          </p:cNvSpPr>
+          <p:nvPr>
+            <p:ph type="body" idx="1"/>
+          </p:nvPr>
+        </p:nvSpPr>
+        <p:spPr/>
+        <p:txBody>
+          <a:bodyPr/>
+          <a:lstStyle/>
+          <a:p>
+            <a:endParaRPr lang="nl-NL" dirty="0"/>
+          </a:p>
+        </p:txBody>
+      </p:sp>
+      <p:sp>
+        <p:nvSpPr>
+          <p:cNvPr id="4" name="Slide Number Placeholder 3"/>
+          <p:cNvSpPr>
+            <a:spLocks noGrp="1"/>
+          </p:cNvSpPr>
+          <p:nvPr>
+            <p:ph type="sldNum" sz="quarter" idx="5"/>
+          </p:nvPr>
+        </p:nvSpPr>
+        <p:spPr/>
+        <p:txBody>
+          <a:bodyPr/>
+          <a:lstStyle/>
+          <a:p>
+            <a:fld id="{E08F8B16-3854-42C5-AC11-311EC9D57CC1}" type="slidenum">
+              <a:rPr lang="nl-NL" smtClean="0"/>
+              <a:t>6</a:t>
+            </a:fld>
+            <a:endParaRPr lang="nl-NL"/>
+          </a:p>
+        </p:txBody>
+      </p:sp>
+    </p:spTree>
+    <p:extLst>
+      <p:ext uri="{BB962C8B-B14F-4D97-AF65-F5344CB8AC3E}">
+        <p14:creationId xmlns:p14="http://schemas.microsoft.com/office/powerpoint/2010/main" val="2802350776"/>
+      </p:ext>
+    </p:extLst>
+  </p:cSld>
+  <p:clrMapOvr>
+    <a:masterClrMapping/>
+  </p:clrMapOvr>
+</p:notes>
+</file>
+
 <file path=ppt/slideLayouts/slideLayout1.xml><?xml version="1.0" encoding="utf-8"?>
 <p:sldLayout xmlns:a="http://schemas.openxmlformats.org/drawingml/2006/main" xmlns:r="http://schemas.openxmlformats.org/officeDocument/2006/relationships" xmlns:p="http://schemas.openxmlformats.org/presentationml/2006/main" type="title" preserve="1">
   <p:cSld name="Title Slide">
@@ -405,7 +842,7 @@
           <a:p>
             <a:fld id="{82085877-2B37-48E7-8B6D-4D4ED486130A}" type="datetimeFigureOut">
               <a:rPr lang="en-BE" smtClean="0"/>
-              <a:t>06/01/2026</a:t>
+              <a:t>06/07/2026</a:t>
             </a:fld>
             <a:endParaRPr lang="en-BE"/>
           </a:p>
@@ -605,7 +1042,7 @@
           <a:p>
             <a:fld id="{82085877-2B37-48E7-8B6D-4D4ED486130A}" type="datetimeFigureOut">
               <a:rPr lang="en-BE" smtClean="0"/>
-              <a:t>06/01/2026</a:t>
+              <a:t>06/07/2026</a:t>
             </a:fld>
             <a:endParaRPr lang="en-BE"/>
           </a:p>
@@ -815,7 +1252,7 @@
           <a:p>
             <a:fld id="{82085877-2B37-48E7-8B6D-4D4ED486130A}" type="datetimeFigureOut">
               <a:rPr lang="en-BE" smtClean="0"/>
-              <a:t>06/01/2026</a:t>
+              <a:t>06/07/2026</a:t>
             </a:fld>
             <a:endParaRPr lang="en-BE"/>
           </a:p>
@@ -1015,7 +1452,7 @@
           <a:p>
             <a:fld id="{82085877-2B37-48E7-8B6D-4D4ED486130A}" type="datetimeFigureOut">
               <a:rPr lang="en-BE" smtClean="0"/>
-              <a:t>06/01/2026</a:t>
+              <a:t>06/07/2026</a:t>
             </a:fld>
             <a:endParaRPr lang="en-BE"/>
           </a:p>
@@ -1291,7 +1728,7 @@
           <a:p>
             <a:fld id="{82085877-2B37-48E7-8B6D-4D4ED486130A}" type="datetimeFigureOut">
               <a:rPr lang="en-BE" smtClean="0"/>
-              <a:t>06/01/2026</a:t>
+              <a:t>06/07/2026</a:t>
             </a:fld>
             <a:endParaRPr lang="en-BE"/>
           </a:p>
@@ -1559,7 +1996,7 @@
           <a:p>
             <a:fld id="{82085877-2B37-48E7-8B6D-4D4ED486130A}" type="datetimeFigureOut">
               <a:rPr lang="en-BE" smtClean="0"/>
-              <a:t>06/01/2026</a:t>
+              <a:t>06/07/2026</a:t>
             </a:fld>
             <a:endParaRPr lang="en-BE"/>
           </a:p>
@@ -1974,7 +2411,7 @@
           <a:p>
             <a:fld id="{82085877-2B37-48E7-8B6D-4D4ED486130A}" type="datetimeFigureOut">
               <a:rPr lang="en-BE" smtClean="0"/>
-              <a:t>06/01/2026</a:t>
+              <a:t>06/07/2026</a:t>
             </a:fld>
             <a:endParaRPr lang="en-BE"/>
           </a:p>
@@ -2116,7 +2553,7 @@
           <a:p>
             <a:fld id="{82085877-2B37-48E7-8B6D-4D4ED486130A}" type="datetimeFigureOut">
               <a:rPr lang="en-BE" smtClean="0"/>
-              <a:t>06/01/2026</a:t>
+              <a:t>06/07/2026</a:t>
             </a:fld>
             <a:endParaRPr lang="en-BE"/>
           </a:p>
@@ -2229,7 +2666,7 @@
           <a:p>
             <a:fld id="{82085877-2B37-48E7-8B6D-4D4ED486130A}" type="datetimeFigureOut">
               <a:rPr lang="en-BE" smtClean="0"/>
-              <a:t>06/01/2026</a:t>
+              <a:t>06/07/2026</a:t>
             </a:fld>
             <a:endParaRPr lang="en-BE"/>
           </a:p>
@@ -2542,7 +2979,7 @@
           <a:p>
             <a:fld id="{82085877-2B37-48E7-8B6D-4D4ED486130A}" type="datetimeFigureOut">
               <a:rPr lang="en-BE" smtClean="0"/>
-              <a:t>06/01/2026</a:t>
+              <a:t>06/07/2026</a:t>
             </a:fld>
             <a:endParaRPr lang="en-BE"/>
           </a:p>
@@ -2831,7 +3268,7 @@
           <a:p>
             <a:fld id="{82085877-2B37-48E7-8B6D-4D4ED486130A}" type="datetimeFigureOut">
               <a:rPr lang="en-BE" smtClean="0"/>
-              <a:t>06/01/2026</a:t>
+              <a:t>06/07/2026</a:t>
             </a:fld>
             <a:endParaRPr lang="en-BE"/>
           </a:p>
@@ -3074,7 +3511,7 @@
           <a:p>
             <a:fld id="{82085877-2B37-48E7-8B6D-4D4ED486130A}" type="datetimeFigureOut">
               <a:rPr lang="en-BE" smtClean="0"/>
-              <a:t>06/01/2026</a:t>
+              <a:t>06/07/2026</a:t>
             </a:fld>
             <a:endParaRPr lang="en-BE"/>
           </a:p>
@@ -3612,19 +4049,17 @@
       </p:sp>
       <p:pic>
         <p:nvPicPr>
-          <p:cNvPr id="5" name="Content Placeholder 4">
-            <a:extLst>
-              <a:ext uri="{FF2B5EF4-FFF2-40B4-BE49-F238E27FC236}">
-                <a16:creationId xmlns:a16="http://schemas.microsoft.com/office/drawing/2014/main" id="{B81F747B-9D9B-BDC0-B2BE-1E5E38426B54}"/>
+          <p:cNvPr id="4" name="Picture 3">
+            <a:extLst>
+              <a:ext uri="{FF2B5EF4-FFF2-40B4-BE49-F238E27FC236}">
+                <a16:creationId xmlns:a16="http://schemas.microsoft.com/office/drawing/2014/main" id="{A2025208-1DA5-D3A1-8500-8BE0986B558F}"/>
               </a:ext>
             </a:extLst>
           </p:cNvPr>
           <p:cNvPicPr>
-            <a:picLocks noGrp="1" noChangeAspect="1"/>
+            <a:picLocks noChangeAspect="1"/>
           </p:cNvPicPr>
-          <p:nvPr>
-            <p:ph idx="1"/>
-          </p:nvPr>
+          <p:nvPr/>
         </p:nvPicPr>
         <p:blipFill>
           <a:blip r:embed="rId2"/>
@@ -3634,8 +4069,8 @@
         </p:blipFill>
         <p:spPr>
           <a:xfrm>
-            <a:off x="114242" y="2377440"/>
-            <a:ext cx="11795513" cy="2916602"/>
+            <a:off x="0" y="1926410"/>
+            <a:ext cx="12192000" cy="3005180"/>
           </a:xfrm>
           <a:prstGeom prst="rect">
             <a:avLst/>
@@ -3722,36 +4157,14 @@
           <a:bodyPr/>
           <a:lstStyle/>
           <a:p>
-            <a:r>
-              <a:rPr lang="en-US" i="1">
-                <a:solidFill>
-                  <a:schemeClr val="bg1">
-                    <a:lumMod val="75000"/>
-                  </a:schemeClr>
-                </a:solidFill>
-              </a:rPr>
-              <a:t>How does your agent deal with enemies (aiming, shooting, item usage, avoidance, hiding, usage of sprint, …)?</a:t>
-            </a:r>
-            <a:endParaRPr lang="en-BE" i="1">
-              <a:solidFill>
-                <a:schemeClr val="bg1">
-                  <a:lumMod val="75000"/>
-                </a:schemeClr>
-              </a:solidFill>
-            </a:endParaRPr>
-          </a:p>
-          <a:p>
-            <a:r>
-              <a:rPr lang="en-US" i="1">
-                <a:solidFill>
-                  <a:schemeClr val="bg1">
-                    <a:lumMod val="75000"/>
-                  </a:schemeClr>
-                </a:solidFill>
-              </a:rPr>
-              <a:t>USE IMAGES/GIFS</a:t>
-            </a:r>
-            <a:endParaRPr lang="en-BE"/>
+            <a:pPr marL="0" indent="0">
+              <a:buNone/>
+            </a:pPr>
+            <a:r>
+              <a:rPr lang="en-US" dirty="0"/>
+              <a:t>When the agent gets bitten or the agent sees an enemy, it will check if there is a gun in the inventory and will shoot the enemy</a:t>
+            </a:r>
+            <a:endParaRPr lang="en-BE" dirty="0"/>
           </a:p>
         </p:txBody>
       </p:sp>
@@ -3835,16 +4248,35 @@
           <a:bodyPr/>
           <a:lstStyle/>
           <a:p>
-            <a:r>
-              <a:rPr lang="en-US" i="1" dirty="0">
-                <a:solidFill>
-                  <a:schemeClr val="bg1">
-                    <a:lumMod val="75000"/>
-                  </a:schemeClr>
-                </a:solidFill>
-              </a:rPr>
-              <a:t>How does your agent manage the inventory (inventory organization, item usage, picking up and remembering items,…)? </a:t>
-            </a:r>
+            <a:pPr marL="0" indent="0">
+              <a:buNone/>
+            </a:pPr>
+            <a:r>
+              <a:rPr lang="en-US" dirty="0"/>
+              <a:t>It doesn’t pick up the trash at all</a:t>
+            </a:r>
+          </a:p>
+          <a:p>
+            <a:pPr marL="0" indent="0">
+              <a:buNone/>
+            </a:pPr>
+            <a:r>
+              <a:rPr lang="en-US" dirty="0"/>
+              <a:t>The inventory management is this: a pistol in slot 1, shotgun in slot 2, </a:t>
+            </a:r>
+            <a:r>
+              <a:rPr lang="en-US" dirty="0" err="1"/>
+              <a:t>medkit</a:t>
+            </a:r>
+            <a:r>
+              <a:rPr lang="en-US" dirty="0"/>
+              <a:t> slot 3 and food in slot 4, slot 5 remains open</a:t>
+            </a:r>
+          </a:p>
+          <a:p>
+            <a:pPr marL="0" indent="0">
+              <a:buNone/>
+            </a:pPr>
             <a:endParaRPr lang="en-BE" i="1" dirty="0">
               <a:solidFill>
                 <a:schemeClr val="bg1">
@@ -3938,28 +4370,117 @@
           <a:bodyPr/>
           <a:lstStyle/>
           <a:p>
-            <a:r>
-              <a:rPr lang="en-US" i="1" dirty="0">
-                <a:solidFill>
-                  <a:schemeClr val="bg1">
-                    <a:lumMod val="75000"/>
-                  </a:schemeClr>
-                </a:solidFill>
-              </a:rPr>
-              <a:t>How many steering behaviors does it use? Does it use blended steering?</a:t>
-            </a:r>
-            <a:endParaRPr lang="en-BE" i="1" dirty="0">
-              <a:solidFill>
-                <a:schemeClr val="bg1">
-                  <a:lumMod val="75000"/>
-                </a:schemeClr>
-              </a:solidFill>
-            </a:endParaRPr>
-          </a:p>
-          <a:p>
             <a:pPr marL="0" indent="0">
               <a:buNone/>
             </a:pPr>
+            <a:r>
+              <a:rPr lang="nl-NL" dirty="0"/>
+              <a:t>It </a:t>
+            </a:r>
+            <a:r>
+              <a:rPr lang="nl-NL" dirty="0" err="1"/>
+              <a:t>uses</a:t>
+            </a:r>
+            <a:r>
+              <a:rPr lang="nl-NL" dirty="0"/>
+              <a:t> a </a:t>
+            </a:r>
+            <a:r>
+              <a:rPr lang="nl-NL" dirty="0" err="1"/>
+              <a:t>wander</a:t>
+            </a:r>
+            <a:r>
+              <a:rPr lang="nl-NL" dirty="0"/>
+              <a:t> </a:t>
+            </a:r>
+            <a:r>
+              <a:rPr lang="nl-NL" dirty="0" err="1"/>
+              <a:t>for</a:t>
+            </a:r>
+            <a:r>
+              <a:rPr lang="nl-NL" dirty="0"/>
+              <a:t> </a:t>
+            </a:r>
+            <a:r>
+              <a:rPr lang="nl-NL" dirty="0" err="1"/>
+              <a:t>exploring</a:t>
+            </a:r>
+            <a:r>
+              <a:rPr lang="nl-NL" dirty="0"/>
+              <a:t> </a:t>
+            </a:r>
+            <a:r>
+              <a:rPr lang="nl-NL" dirty="0" err="1"/>
+              <a:t>the</a:t>
+            </a:r>
+            <a:r>
+              <a:rPr lang="nl-NL" dirty="0"/>
+              <a:t> </a:t>
+            </a:r>
+            <a:r>
+              <a:rPr lang="nl-NL" dirty="0" err="1"/>
+              <a:t>world</a:t>
+            </a:r>
+            <a:r>
+              <a:rPr lang="nl-NL" dirty="0"/>
+              <a:t> </a:t>
+            </a:r>
+            <a:r>
+              <a:rPr lang="nl-NL" dirty="0" err="1"/>
+              <a:t>and</a:t>
+            </a:r>
+            <a:r>
+              <a:rPr lang="nl-NL" dirty="0"/>
+              <a:t> </a:t>
+            </a:r>
+            <a:r>
+              <a:rPr lang="nl-NL" dirty="0" err="1"/>
+              <a:t>Flee</a:t>
+            </a:r>
+            <a:r>
+              <a:rPr lang="nl-NL" dirty="0"/>
+              <a:t> in case </a:t>
+            </a:r>
+            <a:r>
+              <a:rPr lang="nl-NL" dirty="0" err="1"/>
+              <a:t>an</a:t>
+            </a:r>
+            <a:r>
+              <a:rPr lang="nl-NL" dirty="0"/>
+              <a:t> </a:t>
+            </a:r>
+            <a:r>
+              <a:rPr lang="nl-NL" dirty="0" err="1"/>
+              <a:t>enemy</a:t>
+            </a:r>
+            <a:r>
+              <a:rPr lang="nl-NL" dirty="0"/>
+              <a:t> bit </a:t>
+            </a:r>
+            <a:r>
+              <a:rPr lang="nl-NL" dirty="0" err="1"/>
+              <a:t>the</a:t>
+            </a:r>
+            <a:r>
+              <a:rPr lang="nl-NL" dirty="0"/>
+              <a:t> player </a:t>
+            </a:r>
+            <a:r>
+              <a:rPr lang="nl-NL" dirty="0" err="1"/>
+              <a:t>with</a:t>
+            </a:r>
+            <a:r>
+              <a:rPr lang="nl-NL" dirty="0"/>
+              <a:t> a </a:t>
+            </a:r>
+            <a:r>
+              <a:rPr lang="nl-NL" dirty="0" err="1"/>
+              <a:t>blended</a:t>
+            </a:r>
+            <a:r>
+              <a:rPr lang="nl-NL" dirty="0"/>
+              <a:t> steering</a:t>
+            </a:r>
             <a:endParaRPr lang="en-BE" dirty="0"/>
           </a:p>
         </p:txBody>
@@ -4048,34 +4569,126 @@
           <a:bodyPr/>
           <a:lstStyle/>
           <a:p>
-            <a:r>
-              <a:rPr lang="en-US" i="1" dirty="0">
-                <a:solidFill>
-                  <a:schemeClr val="bg1">
-                    <a:lumMod val="75000"/>
-                  </a:schemeClr>
-                </a:solidFill>
-              </a:rPr>
-              <a:t>How does your agent explore the world ( how does it traverse the world, when and why does it visit houses, does it have a memory?)?</a:t>
-            </a:r>
-          </a:p>
-          <a:p>
-            <a:r>
-              <a:rPr lang="en-US" i="1" dirty="0">
-                <a:solidFill>
-                  <a:schemeClr val="bg1">
-                    <a:lumMod val="75000"/>
-                  </a:schemeClr>
-                </a:solidFill>
-              </a:rPr>
-              <a:t>USE IMAGES/GIFS</a:t>
-            </a:r>
+            <a:pPr marL="0" indent="0">
+              <a:buNone/>
+            </a:pPr>
+            <a:endParaRPr lang="en-US" dirty="0">
+              <a:solidFill>
+                <a:schemeClr val="bg1">
+                  <a:lumMod val="75000"/>
+                </a:schemeClr>
+              </a:solidFill>
+            </a:endParaRPr>
           </a:p>
           <a:p>
             <a:pPr marL="0" indent="0">
               <a:buNone/>
             </a:pPr>
             <a:endParaRPr lang="en-BE" dirty="0"/>
+          </a:p>
+        </p:txBody>
+      </p:sp>
+      <p:sp>
+        <p:nvSpPr>
+          <p:cNvPr id="4" name="TextBox 3">
+            <a:extLst>
+              <a:ext uri="{FF2B5EF4-FFF2-40B4-BE49-F238E27FC236}">
+                <a16:creationId xmlns:a16="http://schemas.microsoft.com/office/drawing/2014/main" id="{064BC435-7534-33BF-5194-8555DA146825}"/>
+              </a:ext>
+            </a:extLst>
+          </p:cNvPr>
+          <p:cNvSpPr txBox="1"/>
+          <p:nvPr/>
+        </p:nvSpPr>
+        <p:spPr>
+          <a:xfrm>
+            <a:off x="838200" y="1729333"/>
+            <a:ext cx="10609250" cy="369332"/>
+          </a:xfrm>
+          <a:prstGeom prst="rect">
+            <a:avLst/>
+          </a:prstGeom>
+          <a:noFill/>
+        </p:spPr>
+        <p:txBody>
+          <a:bodyPr wrap="square" rtlCol="0">
+            <a:spAutoFit/>
+          </a:bodyPr>
+          <a:lstStyle/>
+          <a:p>
+            <a:r>
+              <a:rPr lang="nl-NL" dirty="0"/>
+              <a:t>The agent </a:t>
+            </a:r>
+            <a:r>
+              <a:rPr lang="nl-NL" dirty="0" err="1"/>
+              <a:t>wanders</a:t>
+            </a:r>
+            <a:r>
+              <a:rPr lang="nl-NL" dirty="0"/>
+              <a:t> </a:t>
+            </a:r>
+            <a:r>
+              <a:rPr lang="nl-NL" dirty="0" err="1"/>
+              <a:t>around</a:t>
+            </a:r>
+            <a:r>
+              <a:rPr lang="nl-NL" dirty="0"/>
+              <a:t> </a:t>
+            </a:r>
+            <a:r>
+              <a:rPr lang="nl-NL" dirty="0" err="1"/>
+              <a:t>until</a:t>
+            </a:r>
+            <a:r>
+              <a:rPr lang="nl-NL" dirty="0"/>
+              <a:t> </a:t>
+            </a:r>
+            <a:r>
+              <a:rPr lang="nl-NL" dirty="0" err="1"/>
+              <a:t>it</a:t>
+            </a:r>
+            <a:r>
+              <a:rPr lang="nl-NL" dirty="0"/>
+              <a:t> </a:t>
+            </a:r>
+            <a:r>
+              <a:rPr lang="nl-NL" dirty="0" err="1"/>
+              <a:t>sees</a:t>
+            </a:r>
+            <a:r>
+              <a:rPr lang="nl-NL" dirty="0"/>
+              <a:t> a house </a:t>
+            </a:r>
+            <a:r>
+              <a:rPr lang="nl-NL" dirty="0" err="1"/>
+              <a:t>and</a:t>
+            </a:r>
+            <a:r>
+              <a:rPr lang="nl-NL" dirty="0"/>
+              <a:t> </a:t>
+            </a:r>
+            <a:r>
+              <a:rPr lang="nl-NL" dirty="0" err="1"/>
+              <a:t>it</a:t>
+            </a:r>
+            <a:r>
+              <a:rPr lang="nl-NL" dirty="0"/>
+              <a:t> </a:t>
+            </a:r>
+            <a:r>
+              <a:rPr lang="nl-NL" dirty="0" err="1"/>
+              <a:t>will</a:t>
+            </a:r>
+            <a:r>
+              <a:rPr lang="nl-NL" dirty="0"/>
+              <a:t> enter </a:t>
+            </a:r>
+            <a:r>
+              <a:rPr lang="nl-NL"/>
+              <a:t>it.</a:t>
+            </a:r>
+            <a:endParaRPr lang="nl-NL" dirty="0"/>
           </a:p>
         </p:txBody>
       </p:sp>
@@ -4485,6 +5098,321 @@
   <a:extLst>
     <a:ext uri="{05A4C25C-085E-4340-85A3-A5531E510DB2}">
       <thm15:themeFamily xmlns:thm15="http://schemas.microsoft.com/office/thememl/2012/main" name="Office Theme" id="{62F939B6-93AF-4DB8-9C6B-D6C7DFDC589F}" vid="{4A3C46E8-61CC-4603-A589-7422A47A8E4A}"/>
+    </a:ext>
+  </a:extLst>
+</a:theme>
+</file>
+
+<file path=ppt/theme/theme2.xml><?xml version="1.0" encoding="utf-8"?>
+<a:theme xmlns:a="http://schemas.openxmlformats.org/drawingml/2006/main" name="Office Theme">
+  <a:themeElements>
+    <a:clrScheme name="Office">
+      <a:dk1>
+        <a:sysClr val="windowText" lastClr="000000"/>
+      </a:dk1>
+      <a:lt1>
+        <a:sysClr val="window" lastClr="FFFFFF"/>
+      </a:lt1>
+      <a:dk2>
+        <a:srgbClr val="0E2841"/>
+      </a:dk2>
+      <a:lt2>
+        <a:srgbClr val="E8E8E8"/>
+      </a:lt2>
+      <a:accent1>
+        <a:srgbClr val="156082"/>
+      </a:accent1>
+      <a:accent2>
+        <a:srgbClr val="E97132"/>
+      </a:accent2>
+      <a:accent3>
+        <a:srgbClr val="196B24"/>
+      </a:accent3>
+      <a:accent4>
+        <a:srgbClr val="0F9ED5"/>
+      </a:accent4>
+      <a:accent5>
+        <a:srgbClr val="A02B93"/>
+      </a:accent5>
+      <a:accent6>
+        <a:srgbClr val="4EA72E"/>
+      </a:accent6>
+      <a:hlink>
+        <a:srgbClr val="467886"/>
+      </a:hlink>
+      <a:folHlink>
+        <a:srgbClr val="96607D"/>
+      </a:folHlink>
+    </a:clrScheme>
+    <a:fontScheme name="Office">
+      <a:majorFont>
+        <a:latin typeface="Aptos Display" panose="02110004020202020204"/>
+        <a:ea typeface=""/>
+        <a:cs typeface=""/>
+        <a:font script="Jpan" typeface="游ゴシック Light"/>
+        <a:font script="Hang" typeface="맑은 고딕"/>
+        <a:font script="Hans" typeface="等线 Light"/>
+        <a:font script="Hant" typeface="新細明體"/>
+        <a:font script="Arab" typeface="Times New Roman"/>
+        <a:font script="Hebr" typeface="Times New Roman"/>
+        <a:font script="Thai" typeface="Angsana New"/>
+        <a:font script="Ethi" typeface="Nyala"/>
+        <a:font script="Beng" typeface="Vrinda"/>
+        <a:font script="Gujr" typeface="Shruti"/>
+        <a:font script="Khmr" typeface="MoolBoran"/>
+        <a:font script="Knda" typeface="Tunga"/>
+        <a:font script="Guru" typeface="Raavi"/>
+        <a:font script="Cans" typeface="Euphemia"/>
+        <a:font script="Cher" typeface="Plantagenet Cherokee"/>
+        <a:font script="Yiii" typeface="Microsoft Yi Baiti"/>
+        <a:font script="Tibt" typeface="Microsoft Himalaya"/>
+        <a:font script="Thaa" typeface="MV Boli"/>
+        <a:font script="Deva" typeface="Mangal"/>
+        <a:font script="Telu" typeface="Gautami"/>
+        <a:font script="Taml" typeface="Latha"/>
+        <a:font script="Syrc" typeface="Estrangelo Edessa"/>
+        <a:font script="Orya" typeface="Kalinga"/>
+        <a:font script="Mlym" typeface="Kartika"/>
+        <a:font script="Laoo" typeface="DokChampa"/>
+        <a:font script="Sinh" typeface="Iskoola Pota"/>
+        <a:font script="Mong" typeface="Mongolian Baiti"/>
+        <a:font script="Viet" typeface="Times New Roman"/>
+        <a:font script="Uigh" typeface="Microsoft Uighur"/>
+        <a:font script="Geor" typeface="Sylfaen"/>
+        <a:font script="Armn" typeface="Arial"/>
+        <a:font script="Bugi" typeface="Leelawadee UI"/>
+        <a:font script="Bopo" typeface="Microsoft JhengHei"/>
+        <a:font script="Java" typeface="Javanese Text"/>
+        <a:font script="Lisu" typeface="Segoe UI"/>
+        <a:font script="Mymr" typeface="Myanmar Text"/>
+        <a:font script="Nkoo" typeface="Ebrima"/>
+        <a:font script="Olck" typeface="Nirmala UI"/>
+        <a:font script="Osma" typeface="Ebrima"/>
+        <a:font script="Phag" typeface="Phagspa"/>
+        <a:font script="Syrn" typeface="Estrangelo Edessa"/>
+        <a:font script="Syrj" typeface="Estrangelo Edessa"/>
+        <a:font script="Syre" typeface="Estrangelo Edessa"/>
+        <a:font script="Sora" typeface="Nirmala UI"/>
+        <a:font script="Tale" typeface="Microsoft Tai Le"/>
+        <a:font script="Talu" typeface="Microsoft New Tai Lue"/>
+        <a:font script="Tfng" typeface="Ebrima"/>
+      </a:majorFont>
+      <a:minorFont>
+        <a:latin typeface="Aptos" panose="02110004020202020204"/>
+        <a:ea typeface=""/>
+        <a:cs typeface=""/>
+        <a:font script="Jpan" typeface="游ゴシック"/>
+        <a:font script="Hang" typeface="맑은 고딕"/>
+        <a:font script="Hans" typeface="等线"/>
+        <a:font script="Hant" typeface="新細明體"/>
+        <a:font script="Arab" typeface="Arial"/>
+        <a:font script="Hebr" typeface="Arial"/>
+        <a:font script="Thai" typeface="Cordia New"/>
+        <a:font script="Ethi" typeface="Nyala"/>
+        <a:font script="Beng" typeface="Vrinda"/>
+        <a:font script="Gujr" typeface="Shruti"/>
+        <a:font script="Khmr" typeface="DaunPenh"/>
+        <a:font script="Knda" typeface="Tunga"/>
+        <a:font script="Guru" typeface="Raavi"/>
+        <a:font script="Cans" typeface="Euphemia"/>
+        <a:font script="Cher" typeface="Plantagenet Cherokee"/>
+        <a:font script="Yiii" typeface="Microsoft Yi Baiti"/>
+        <a:font script="Tibt" typeface="Microsoft Himalaya"/>
+        <a:font script="Thaa" typeface="MV Boli"/>
+        <a:font script="Deva" typeface="Mangal"/>
+        <a:font script="Telu" typeface="Gautami"/>
+        <a:font script="Taml" typeface="Latha"/>
+        <a:font script="Syrc" typeface="Estrangelo Edessa"/>
+        <a:font script="Orya" typeface="Kalinga"/>
+        <a:font script="Mlym" typeface="Kartika"/>
+        <a:font script="Laoo" typeface="DokChampa"/>
+        <a:font script="Sinh" typeface="Iskoola Pota"/>
+        <a:font script="Mong" typeface="Mongolian Baiti"/>
+        <a:font script="Viet" typeface="Arial"/>
+        <a:font script="Uigh" typeface="Microsoft Uighur"/>
+        <a:font script="Geor" typeface="Sylfaen"/>
+        <a:font script="Armn" typeface="Arial"/>
+        <a:font script="Bugi" typeface="Leelawadee UI"/>
+        <a:font script="Bopo" typeface="Microsoft JhengHei"/>
+        <a:font script="Java" typeface="Javanese Text"/>
+        <a:font script="Lisu" typeface="Segoe UI"/>
+        <a:font script="Mymr" typeface="Myanmar Text"/>
+        <a:font script="Nkoo" typeface="Ebrima"/>
+        <a:font script="Olck" typeface="Nirmala UI"/>
+        <a:font script="Osma" typeface="Ebrima"/>
+        <a:font script="Phag" typeface="Phagspa"/>
+        <a:font script="Syrn" typeface="Estrangelo Edessa"/>
+        <a:font script="Syrj" typeface="Estrangelo Edessa"/>
+        <a:font script="Syre" typeface="Estrangelo Edessa"/>
+        <a:font script="Sora" typeface="Nirmala UI"/>
+        <a:font script="Tale" typeface="Microsoft Tai Le"/>
+        <a:font script="Talu" typeface="Microsoft New Tai Lue"/>
+        <a:font script="Tfng" typeface="Ebrima"/>
+      </a:minorFont>
+    </a:fontScheme>
+    <a:fmtScheme name="Office">
+      <a:fillStyleLst>
+        <a:solidFill>
+          <a:schemeClr val="phClr"/>
+        </a:solidFill>
+        <a:gradFill rotWithShape="1">
+          <a:gsLst>
+            <a:gs pos="0">
+              <a:schemeClr val="phClr">
+                <a:lumMod val="110000"/>
+                <a:satMod val="105000"/>
+                <a:tint val="67000"/>
+              </a:schemeClr>
+            </a:gs>
+            <a:gs pos="50000">
+              <a:schemeClr val="phClr">
+                <a:lumMod val="105000"/>
+                <a:satMod val="103000"/>
+                <a:tint val="73000"/>
+              </a:schemeClr>
+            </a:gs>
+            <a:gs pos="100000">
+              <a:schemeClr val="phClr">
+                <a:lumMod val="105000"/>
+                <a:satMod val="109000"/>
+                <a:tint val="81000"/>
+              </a:schemeClr>
+            </a:gs>
+          </a:gsLst>
+          <a:lin ang="5400000" scaled="0"/>
+        </a:gradFill>
+        <a:gradFill rotWithShape="1">
+          <a:gsLst>
+            <a:gs pos="0">
+              <a:schemeClr val="phClr">
+                <a:satMod val="103000"/>
+                <a:lumMod val="102000"/>
+                <a:tint val="94000"/>
+              </a:schemeClr>
+            </a:gs>
+            <a:gs pos="50000">
+              <a:schemeClr val="phClr">
+                <a:satMod val="110000"/>
+                <a:lumMod val="100000"/>
+                <a:shade val="100000"/>
+              </a:schemeClr>
+            </a:gs>
+            <a:gs pos="100000">
+              <a:schemeClr val="phClr">
+                <a:lumMod val="99000"/>
+                <a:satMod val="120000"/>
+                <a:shade val="78000"/>
+              </a:schemeClr>
+            </a:gs>
+          </a:gsLst>
+          <a:lin ang="5400000" scaled="0"/>
+        </a:gradFill>
+      </a:fillStyleLst>
+      <a:lnStyleLst>
+        <a:ln w="12700" cap="flat" cmpd="sng" algn="ctr">
+          <a:solidFill>
+            <a:schemeClr val="phClr"/>
+          </a:solidFill>
+          <a:prstDash val="solid"/>
+          <a:miter lim="800000"/>
+        </a:ln>
+        <a:ln w="19050" cap="flat" cmpd="sng" algn="ctr">
+          <a:solidFill>
+            <a:schemeClr val="phClr"/>
+          </a:solidFill>
+          <a:prstDash val="solid"/>
+          <a:miter lim="800000"/>
+        </a:ln>
+        <a:ln w="25400" cap="flat" cmpd="sng" algn="ctr">
+          <a:solidFill>
+            <a:schemeClr val="phClr"/>
+          </a:solidFill>
+          <a:prstDash val="solid"/>
+          <a:miter lim="800000"/>
+        </a:ln>
+      </a:lnStyleLst>
+      <a:effectStyleLst>
+        <a:effectStyle>
+          <a:effectLst/>
+        </a:effectStyle>
+        <a:effectStyle>
+          <a:effectLst/>
+        </a:effectStyle>
+        <a:effectStyle>
+          <a:effectLst>
+            <a:outerShdw blurRad="57150" dist="19050" dir="5400000" algn="ctr" rotWithShape="0">
+              <a:srgbClr val="000000">
+                <a:alpha val="63000"/>
+              </a:srgbClr>
+            </a:outerShdw>
+          </a:effectLst>
+        </a:effectStyle>
+      </a:effectStyleLst>
+      <a:bgFillStyleLst>
+        <a:solidFill>
+          <a:schemeClr val="phClr"/>
+        </a:solidFill>
+        <a:solidFill>
+          <a:schemeClr val="phClr">
+            <a:tint val="95000"/>
+            <a:satMod val="170000"/>
+          </a:schemeClr>
+        </a:solidFill>
+        <a:gradFill rotWithShape="1">
+          <a:gsLst>
+            <a:gs pos="0">
+              <a:schemeClr val="phClr">
+                <a:tint val="93000"/>
+                <a:satMod val="150000"/>
+                <a:shade val="98000"/>
+                <a:lumMod val="102000"/>
+              </a:schemeClr>
+            </a:gs>
+            <a:gs pos="50000">
+              <a:schemeClr val="phClr">
+                <a:tint val="98000"/>
+                <a:satMod val="130000"/>
+                <a:shade val="90000"/>
+                <a:lumMod val="103000"/>
+              </a:schemeClr>
+            </a:gs>
+            <a:gs pos="100000">
+              <a:schemeClr val="phClr">
+                <a:shade val="63000"/>
+                <a:satMod val="120000"/>
+              </a:schemeClr>
+            </a:gs>
+          </a:gsLst>
+          <a:lin ang="5400000" scaled="0"/>
+        </a:gradFill>
+      </a:bgFillStyleLst>
+    </a:fmtScheme>
+  </a:themeElements>
+  <a:objectDefaults>
+    <a:lnDef>
+      <a:spPr/>
+      <a:bodyPr/>
+      <a:lstStyle/>
+      <a:style>
+        <a:lnRef idx="2">
+          <a:schemeClr val="accent1"/>
+        </a:lnRef>
+        <a:fillRef idx="0">
+          <a:schemeClr val="accent1"/>
+        </a:fillRef>
+        <a:effectRef idx="1">
+          <a:schemeClr val="accent1"/>
+        </a:effectRef>
+        <a:fontRef idx="minor">
+          <a:schemeClr val="tx1"/>
+        </a:fontRef>
+      </a:style>
+    </a:lnDef>
+  </a:objectDefaults>
+  <a:extraClrSchemeLst/>
+  <a:extLst>
+    <a:ext uri="{05A4C25C-085E-4340-85A3-A5531E510DB2}">
+      <thm15:themeFamily xmlns:thm15="http://schemas.microsoft.com/office/thememl/2012/main" name="Office Theme" id="{2E142A2C-CD16-42D6-873A-C26D2A0506FA}" vid="{1BDDFF52-6CD6-40A5-AB3C-68EB2F1E4D0A}"/>
     </a:ext>
   </a:extLst>
 </a:theme>

--- a/GPP_ZombieAI_DelieWout_2DAE19.pptx
+++ b/GPP_ZombieAI_DelieWout_2DAE19.pptx
@@ -5,7 +5,7 @@
     <p:sldMasterId id="2147483648" r:id="rId4"/>
   </p:sldMasterIdLst>
   <p:notesMasterIdLst>
-    <p:notesMasterId r:id="rId12"/>
+    <p:notesMasterId r:id="rId11"/>
   </p:notesMasterIdLst>
   <p:sldIdLst>
     <p:sldId id="256" r:id="rId5"/>
@@ -14,7 +14,6 @@
     <p:sldId id="258" r:id="rId8"/>
     <p:sldId id="259" r:id="rId9"/>
     <p:sldId id="262" r:id="rId10"/>
-    <p:sldId id="261" r:id="rId11"/>
   </p:sldIdLst>
   <p:sldSz cx="12192000" cy="6858000"/>
   <p:notesSz cx="6858000" cy="9144000"/>
@@ -4162,9 +4161,8 @@
             </a:pPr>
             <a:r>
               <a:rPr lang="en-US" dirty="0"/>
-              <a:t>When the agent gets bitten or the agent sees an enemy, it will check if there is a gun in the inventory and will shoot the enemy</a:t>
-            </a:r>
-            <a:endParaRPr lang="en-BE" dirty="0"/>
+              <a:t>When the agent gets bitten or the agent sees an enemy, it will check if there is a gun in the inventory and will shoot the enemy.</a:t>
+            </a:r>
           </a:p>
         </p:txBody>
       </p:sp>
@@ -4277,6 +4275,18 @@
             <a:pPr marL="0" indent="0">
               <a:buNone/>
             </a:pPr>
+            <a:endParaRPr lang="en-US" dirty="0"/>
+          </a:p>
+          <a:p>
+            <a:pPr marL="0" indent="0">
+              <a:buNone/>
+            </a:pPr>
+            <a:endParaRPr lang="en-US" dirty="0"/>
+          </a:p>
+          <a:p>
+            <a:pPr marL="0" indent="0">
+              <a:buNone/>
+            </a:pPr>
             <a:endParaRPr lang="en-BE" i="1" dirty="0">
               <a:solidFill>
                 <a:schemeClr val="bg1">
@@ -4479,8 +4489,197 @@
             </a:r>
             <a:r>
               <a:rPr lang="nl-NL" dirty="0"/>
-              <a:t> steering</a:t>
-            </a:r>
+              <a:t> steering.</a:t>
+            </a:r>
+          </a:p>
+          <a:p>
+            <a:pPr marL="0" indent="0">
+              <a:buNone/>
+            </a:pPr>
+            <a:r>
+              <a:rPr lang="nl-NL" dirty="0" err="1"/>
+              <a:t>When</a:t>
+            </a:r>
+            <a:r>
+              <a:rPr lang="nl-NL" dirty="0"/>
+              <a:t> </a:t>
+            </a:r>
+            <a:r>
+              <a:rPr lang="nl-NL" dirty="0" err="1"/>
+              <a:t>an</a:t>
+            </a:r>
+            <a:r>
+              <a:rPr lang="nl-NL" dirty="0"/>
+              <a:t> object is found </a:t>
+            </a:r>
+            <a:r>
+              <a:rPr lang="nl-NL" dirty="0" err="1"/>
+              <a:t>that</a:t>
+            </a:r>
+            <a:r>
+              <a:rPr lang="nl-NL" dirty="0"/>
+              <a:t> is </a:t>
+            </a:r>
+            <a:r>
+              <a:rPr lang="nl-NL" dirty="0" err="1"/>
+              <a:t>not</a:t>
+            </a:r>
+            <a:r>
+              <a:rPr lang="nl-NL" dirty="0"/>
+              <a:t> </a:t>
+            </a:r>
+            <a:r>
+              <a:rPr lang="nl-NL" dirty="0" err="1"/>
+              <a:t>garbage</a:t>
+            </a:r>
+            <a:r>
+              <a:rPr lang="nl-NL" dirty="0"/>
+              <a:t> </a:t>
+            </a:r>
+            <a:r>
+              <a:rPr lang="nl-NL" dirty="0" err="1"/>
+              <a:t>it</a:t>
+            </a:r>
+            <a:r>
+              <a:rPr lang="nl-NL" dirty="0"/>
+              <a:t> </a:t>
+            </a:r>
+            <a:r>
+              <a:rPr lang="nl-NL" dirty="0" err="1"/>
+              <a:t>will</a:t>
+            </a:r>
+            <a:r>
+              <a:rPr lang="nl-NL" dirty="0"/>
+              <a:t> run </a:t>
+            </a:r>
+            <a:r>
+              <a:rPr lang="nl-NL" dirty="0" err="1"/>
+              <a:t>towards</a:t>
+            </a:r>
+            <a:r>
+              <a:rPr lang="nl-NL" dirty="0"/>
+              <a:t> </a:t>
+            </a:r>
+            <a:r>
+              <a:rPr lang="nl-NL" dirty="0" err="1"/>
+              <a:t>it</a:t>
+            </a:r>
+            <a:r>
+              <a:rPr lang="nl-NL" dirty="0"/>
+              <a:t> </a:t>
+            </a:r>
+            <a:r>
+              <a:rPr lang="nl-NL" dirty="0" err="1"/>
+              <a:t>and</a:t>
+            </a:r>
+            <a:r>
+              <a:rPr lang="nl-NL" dirty="0"/>
+              <a:t> </a:t>
+            </a:r>
+            <a:r>
+              <a:rPr lang="nl-NL" dirty="0" err="1"/>
+              <a:t>pick</a:t>
+            </a:r>
+            <a:r>
+              <a:rPr lang="nl-NL" dirty="0"/>
+              <a:t> </a:t>
+            </a:r>
+            <a:r>
+              <a:rPr lang="nl-NL" dirty="0" err="1"/>
+              <a:t>it</a:t>
+            </a:r>
+            <a:r>
+              <a:rPr lang="nl-NL" dirty="0"/>
+              <a:t> up</a:t>
+            </a:r>
+          </a:p>
+          <a:p>
+            <a:pPr marL="0" indent="0">
+              <a:buNone/>
+            </a:pPr>
+            <a:r>
+              <a:rPr lang="nl-NL" dirty="0" err="1"/>
+              <a:t>When</a:t>
+            </a:r>
+            <a:r>
+              <a:rPr lang="nl-NL" dirty="0"/>
+              <a:t> </a:t>
+            </a:r>
+            <a:r>
+              <a:rPr lang="nl-NL" dirty="0" err="1"/>
+              <a:t>the</a:t>
+            </a:r>
+            <a:r>
+              <a:rPr lang="nl-NL" dirty="0"/>
+              <a:t> agent </a:t>
+            </a:r>
+            <a:r>
+              <a:rPr lang="nl-NL" dirty="0" err="1"/>
+              <a:t>percepts</a:t>
+            </a:r>
+            <a:r>
+              <a:rPr lang="nl-NL" dirty="0"/>
+              <a:t> </a:t>
+            </a:r>
+            <a:r>
+              <a:rPr lang="nl-NL" dirty="0" err="1"/>
+              <a:t>the</a:t>
+            </a:r>
+            <a:r>
+              <a:rPr lang="nl-NL" dirty="0"/>
+              <a:t> </a:t>
+            </a:r>
+            <a:r>
+              <a:rPr lang="nl-NL" dirty="0" err="1"/>
+              <a:t>nearest</a:t>
+            </a:r>
+            <a:r>
+              <a:rPr lang="nl-NL" dirty="0"/>
+              <a:t> purgezone, </a:t>
+            </a:r>
+            <a:r>
+              <a:rPr lang="nl-NL" dirty="0" err="1"/>
+              <a:t>it</a:t>
+            </a:r>
+            <a:r>
+              <a:rPr lang="nl-NL" dirty="0"/>
+              <a:t> </a:t>
+            </a:r>
+            <a:r>
+              <a:rPr lang="nl-NL" dirty="0" err="1"/>
+              <a:t>flees</a:t>
+            </a:r>
+            <a:r>
+              <a:rPr lang="nl-NL" dirty="0"/>
+              <a:t> </a:t>
+            </a:r>
+            <a:r>
+              <a:rPr lang="nl-NL" dirty="0" err="1"/>
+              <a:t>away</a:t>
+            </a:r>
+            <a:r>
+              <a:rPr lang="nl-NL" dirty="0"/>
+              <a:t> </a:t>
+            </a:r>
+            <a:r>
+              <a:rPr lang="nl-NL" dirty="0" err="1"/>
+              <a:t>from</a:t>
+            </a:r>
+            <a:r>
+              <a:rPr lang="nl-NL" dirty="0"/>
+              <a:t> it.</a:t>
+            </a:r>
+          </a:p>
+          <a:p>
+            <a:pPr marL="0" indent="0">
+              <a:buNone/>
+            </a:pPr>
+            <a:endParaRPr lang="nl-NL" dirty="0"/>
+          </a:p>
+          <a:p>
+            <a:pPr marL="0" indent="0">
+              <a:buNone/>
+            </a:pPr>
             <a:endParaRPr lang="en-BE" dirty="0"/>
           </a:p>
         </p:txBody>
@@ -4590,31 +4789,195 @@
       </p:sp>
       <p:sp>
         <p:nvSpPr>
-          <p:cNvPr id="4" name="TextBox 3">
-            <a:extLst>
-              <a:ext uri="{FF2B5EF4-FFF2-40B4-BE49-F238E27FC236}">
-                <a16:creationId xmlns:a16="http://schemas.microsoft.com/office/drawing/2014/main" id="{064BC435-7534-33BF-5194-8555DA146825}"/>
-              </a:ext>
-            </a:extLst>
-          </p:cNvPr>
-          <p:cNvSpPr txBox="1"/>
+          <p:cNvPr id="5" name="Content Placeholder 2">
+            <a:extLst>
+              <a:ext uri="{FF2B5EF4-FFF2-40B4-BE49-F238E27FC236}">
+                <a16:creationId xmlns:a16="http://schemas.microsoft.com/office/drawing/2014/main" id="{5910C215-3665-9083-CBCA-E1681B709574}"/>
+              </a:ext>
+            </a:extLst>
+          </p:cNvPr>
+          <p:cNvSpPr txBox="1">
+            <a:spLocks/>
+          </p:cNvSpPr>
           <p:nvPr/>
         </p:nvSpPr>
         <p:spPr>
           <a:xfrm>
-            <a:off x="838200" y="1729333"/>
-            <a:ext cx="10609250" cy="369332"/>
+            <a:off x="990600" y="1978025"/>
+            <a:ext cx="10515600" cy="4351338"/>
           </a:xfrm>
           <a:prstGeom prst="rect">
             <a:avLst/>
           </a:prstGeom>
-          <a:noFill/>
         </p:spPr>
         <p:txBody>
-          <a:bodyPr wrap="square" rtlCol="0">
-            <a:spAutoFit/>
+          <a:bodyPr vert="horz" lIns="91440" tIns="45720" rIns="91440" bIns="45720" rtlCol="0">
+            <a:normAutofit/>
           </a:bodyPr>
-          <a:lstStyle/>
+          <a:lstStyle>
+            <a:lvl1pPr marL="228600" indent="-228600" algn="l" defTabSz="914400" rtl="0" eaLnBrk="1" latinLnBrk="0" hangingPunct="1">
+              <a:lnSpc>
+                <a:spcPct val="90000"/>
+              </a:lnSpc>
+              <a:spcBef>
+                <a:spcPts val="1000"/>
+              </a:spcBef>
+              <a:buFont typeface="Arial" panose="020B0604020202020204" pitchFamily="34" charset="0"/>
+              <a:buChar char="•"/>
+              <a:defRPr sz="2800" kern="1200">
+                <a:solidFill>
+                  <a:schemeClr val="tx1"/>
+                </a:solidFill>
+                <a:latin typeface="+mn-lt"/>
+                <a:ea typeface="+mn-ea"/>
+                <a:cs typeface="+mn-cs"/>
+              </a:defRPr>
+            </a:lvl1pPr>
+            <a:lvl2pPr marL="685800" indent="-228600" algn="l" defTabSz="914400" rtl="0" eaLnBrk="1" latinLnBrk="0" hangingPunct="1">
+              <a:lnSpc>
+                <a:spcPct val="90000"/>
+              </a:lnSpc>
+              <a:spcBef>
+                <a:spcPts val="500"/>
+              </a:spcBef>
+              <a:buFont typeface="Arial" panose="020B0604020202020204" pitchFamily="34" charset="0"/>
+              <a:buChar char="•"/>
+              <a:defRPr sz="2400" kern="1200">
+                <a:solidFill>
+                  <a:schemeClr val="tx1"/>
+                </a:solidFill>
+                <a:latin typeface="+mn-lt"/>
+                <a:ea typeface="+mn-ea"/>
+                <a:cs typeface="+mn-cs"/>
+              </a:defRPr>
+            </a:lvl2pPr>
+            <a:lvl3pPr marL="1143000" indent="-228600" algn="l" defTabSz="914400" rtl="0" eaLnBrk="1" latinLnBrk="0" hangingPunct="1">
+              <a:lnSpc>
+                <a:spcPct val="90000"/>
+              </a:lnSpc>
+              <a:spcBef>
+                <a:spcPts val="500"/>
+              </a:spcBef>
+              <a:buFont typeface="Arial" panose="020B0604020202020204" pitchFamily="34" charset="0"/>
+              <a:buChar char="•"/>
+              <a:defRPr sz="2000" kern="1200">
+                <a:solidFill>
+                  <a:schemeClr val="tx1"/>
+                </a:solidFill>
+                <a:latin typeface="+mn-lt"/>
+                <a:ea typeface="+mn-ea"/>
+                <a:cs typeface="+mn-cs"/>
+              </a:defRPr>
+            </a:lvl3pPr>
+            <a:lvl4pPr marL="1600200" indent="-228600" algn="l" defTabSz="914400" rtl="0" eaLnBrk="1" latinLnBrk="0" hangingPunct="1">
+              <a:lnSpc>
+                <a:spcPct val="90000"/>
+              </a:lnSpc>
+              <a:spcBef>
+                <a:spcPts val="500"/>
+              </a:spcBef>
+              <a:buFont typeface="Arial" panose="020B0604020202020204" pitchFamily="34" charset="0"/>
+              <a:buChar char="•"/>
+              <a:defRPr sz="1800" kern="1200">
+                <a:solidFill>
+                  <a:schemeClr val="tx1"/>
+                </a:solidFill>
+                <a:latin typeface="+mn-lt"/>
+                <a:ea typeface="+mn-ea"/>
+                <a:cs typeface="+mn-cs"/>
+              </a:defRPr>
+            </a:lvl4pPr>
+            <a:lvl5pPr marL="2057400" indent="-228600" algn="l" defTabSz="914400" rtl="0" eaLnBrk="1" latinLnBrk="0" hangingPunct="1">
+              <a:lnSpc>
+                <a:spcPct val="90000"/>
+              </a:lnSpc>
+              <a:spcBef>
+                <a:spcPts val="500"/>
+              </a:spcBef>
+              <a:buFont typeface="Arial" panose="020B0604020202020204" pitchFamily="34" charset="0"/>
+              <a:buChar char="•"/>
+              <a:defRPr sz="1800" kern="1200">
+                <a:solidFill>
+                  <a:schemeClr val="tx1"/>
+                </a:solidFill>
+                <a:latin typeface="+mn-lt"/>
+                <a:ea typeface="+mn-ea"/>
+                <a:cs typeface="+mn-cs"/>
+              </a:defRPr>
+            </a:lvl5pPr>
+            <a:lvl6pPr marL="2514600" indent="-228600" algn="l" defTabSz="914400" rtl="0" eaLnBrk="1" latinLnBrk="0" hangingPunct="1">
+              <a:lnSpc>
+                <a:spcPct val="90000"/>
+              </a:lnSpc>
+              <a:spcBef>
+                <a:spcPts val="500"/>
+              </a:spcBef>
+              <a:buFont typeface="Arial" panose="020B0604020202020204" pitchFamily="34" charset="0"/>
+              <a:buChar char="•"/>
+              <a:defRPr sz="1800" kern="1200">
+                <a:solidFill>
+                  <a:schemeClr val="tx1"/>
+                </a:solidFill>
+                <a:latin typeface="+mn-lt"/>
+                <a:ea typeface="+mn-ea"/>
+                <a:cs typeface="+mn-cs"/>
+              </a:defRPr>
+            </a:lvl6pPr>
+            <a:lvl7pPr marL="2971800" indent="-228600" algn="l" defTabSz="914400" rtl="0" eaLnBrk="1" latinLnBrk="0" hangingPunct="1">
+              <a:lnSpc>
+                <a:spcPct val="90000"/>
+              </a:lnSpc>
+              <a:spcBef>
+                <a:spcPts val="500"/>
+              </a:spcBef>
+              <a:buFont typeface="Arial" panose="020B0604020202020204" pitchFamily="34" charset="0"/>
+              <a:buChar char="•"/>
+              <a:defRPr sz="1800" kern="1200">
+                <a:solidFill>
+                  <a:schemeClr val="tx1"/>
+                </a:solidFill>
+                <a:latin typeface="+mn-lt"/>
+                <a:ea typeface="+mn-ea"/>
+                <a:cs typeface="+mn-cs"/>
+              </a:defRPr>
+            </a:lvl7pPr>
+            <a:lvl8pPr marL="3429000" indent="-228600" algn="l" defTabSz="914400" rtl="0" eaLnBrk="1" latinLnBrk="0" hangingPunct="1">
+              <a:lnSpc>
+                <a:spcPct val="90000"/>
+              </a:lnSpc>
+              <a:spcBef>
+                <a:spcPts val="500"/>
+              </a:spcBef>
+              <a:buFont typeface="Arial" panose="020B0604020202020204" pitchFamily="34" charset="0"/>
+              <a:buChar char="•"/>
+              <a:defRPr sz="1800" kern="1200">
+                <a:solidFill>
+                  <a:schemeClr val="tx1"/>
+                </a:solidFill>
+                <a:latin typeface="+mn-lt"/>
+                <a:ea typeface="+mn-ea"/>
+                <a:cs typeface="+mn-cs"/>
+              </a:defRPr>
+            </a:lvl8pPr>
+            <a:lvl9pPr marL="3886200" indent="-228600" algn="l" defTabSz="914400" rtl="0" eaLnBrk="1" latinLnBrk="0" hangingPunct="1">
+              <a:lnSpc>
+                <a:spcPct val="90000"/>
+              </a:lnSpc>
+              <a:spcBef>
+                <a:spcPts val="500"/>
+              </a:spcBef>
+              <a:buFont typeface="Arial" panose="020B0604020202020204" pitchFamily="34" charset="0"/>
+              <a:buChar char="•"/>
+              <a:defRPr sz="1800" kern="1200">
+                <a:solidFill>
+                  <a:schemeClr val="tx1"/>
+                </a:solidFill>
+                <a:latin typeface="+mn-lt"/>
+                <a:ea typeface="+mn-ea"/>
+                <a:cs typeface="+mn-cs"/>
+              </a:defRPr>
+            </a:lvl9pPr>
+          </a:lstStyle>
           <a:p>
             <a:r>
               <a:rPr lang="nl-NL" dirty="0"/>
@@ -4682,13 +5045,186 @@
             </a:r>
             <a:r>
               <a:rPr lang="nl-NL" dirty="0"/>
-              <a:t> enter </a:t>
+              <a:t> enter it.</a:t>
+            </a:r>
+          </a:p>
+          <a:p>
+            <a:r>
+              <a:rPr lang="nl-NL" dirty="0" err="1"/>
+              <a:t>Tried</a:t>
+            </a:r>
+            <a:r>
+              <a:rPr lang="nl-NL" dirty="0"/>
+              <a:t> </a:t>
+            </a:r>
+            <a:r>
+              <a:rPr lang="nl-NL" dirty="0" err="1"/>
+              <a:t>to</a:t>
+            </a:r>
+            <a:r>
+              <a:rPr lang="nl-NL" dirty="0"/>
+              <a:t> </a:t>
+            </a:r>
+            <a:r>
+              <a:rPr lang="nl-NL" dirty="0" err="1"/>
+              <a:t>implement</a:t>
+            </a:r>
+            <a:r>
+              <a:rPr lang="nl-NL" dirty="0"/>
+              <a:t> a log </a:t>
+            </a:r>
+            <a:r>
+              <a:rPr lang="nl-NL" dirty="0" err="1"/>
+              <a:t>when</a:t>
+            </a:r>
+            <a:r>
+              <a:rPr lang="nl-NL" dirty="0"/>
+              <a:t> </a:t>
+            </a:r>
+            <a:r>
+              <a:rPr lang="nl-NL" dirty="0" err="1"/>
+              <a:t>it</a:t>
+            </a:r>
+            <a:r>
+              <a:rPr lang="nl-NL" dirty="0"/>
+              <a:t> </a:t>
+            </a:r>
+            <a:r>
+              <a:rPr lang="nl-NL" dirty="0" err="1"/>
+              <a:t>finds</a:t>
+            </a:r>
+            <a:r>
+              <a:rPr lang="nl-NL" dirty="0"/>
+              <a:t> a new house but </a:t>
+            </a:r>
+            <a:r>
+              <a:rPr lang="nl-NL" dirty="0" err="1"/>
+              <a:t>it</a:t>
+            </a:r>
+            <a:r>
+              <a:rPr lang="nl-NL" dirty="0"/>
+              <a:t> </a:t>
+            </a:r>
+            <a:r>
+              <a:rPr lang="nl-NL" dirty="0" err="1"/>
+              <a:t>didnt</a:t>
+            </a:r>
+            <a:r>
+              <a:rPr lang="nl-NL" dirty="0"/>
+              <a:t> </a:t>
+            </a:r>
+            <a:r>
+              <a:rPr lang="nl-NL" dirty="0" err="1"/>
+              <a:t>work</a:t>
+            </a:r>
+            <a:r>
+              <a:rPr lang="nl-NL" dirty="0"/>
+              <a:t>, </a:t>
+            </a:r>
+            <a:r>
+              <a:rPr lang="nl-NL" dirty="0" err="1"/>
+              <a:t>so</a:t>
+            </a:r>
+            <a:r>
+              <a:rPr lang="nl-NL" dirty="0"/>
+              <a:t> I </a:t>
+            </a:r>
+            <a:r>
+              <a:rPr lang="nl-NL" dirty="0" err="1"/>
+              <a:t>removed</a:t>
+            </a:r>
+            <a:r>
+              <a:rPr lang="nl-NL" dirty="0"/>
+              <a:t> it.</a:t>
+            </a:r>
+          </a:p>
+          <a:p>
+            <a:r>
+              <a:rPr lang="nl-NL" dirty="0" err="1"/>
+              <a:t>When</a:t>
+            </a:r>
+            <a:r>
+              <a:rPr lang="nl-NL" dirty="0"/>
+              <a:t> </a:t>
+            </a:r>
+            <a:r>
+              <a:rPr lang="nl-NL" dirty="0" err="1"/>
+              <a:t>the</a:t>
+            </a:r>
+            <a:r>
+              <a:rPr lang="nl-NL" dirty="0"/>
+              <a:t> agent </a:t>
+            </a:r>
+            <a:r>
+              <a:rPr lang="nl-NL" dirty="0" err="1"/>
+              <a:t>percepts</a:t>
+            </a:r>
+            <a:r>
+              <a:rPr lang="nl-NL" dirty="0"/>
+              <a:t> </a:t>
+            </a:r>
+            <a:r>
+              <a:rPr lang="nl-NL" dirty="0" err="1"/>
+              <a:t>the</a:t>
+            </a:r>
+            <a:r>
+              <a:rPr lang="nl-NL" dirty="0"/>
+              <a:t> </a:t>
+            </a:r>
+            <a:r>
+              <a:rPr lang="nl-NL" dirty="0" err="1"/>
+              <a:t>nearest</a:t>
+            </a:r>
+            <a:r>
+              <a:rPr lang="nl-NL" dirty="0"/>
+              <a:t> purgezone, </a:t>
+            </a:r>
+            <a:r>
+              <a:rPr lang="nl-NL" dirty="0" err="1"/>
+              <a:t>it</a:t>
+            </a:r>
+            <a:r>
+              <a:rPr lang="nl-NL" dirty="0"/>
+              <a:t> </a:t>
+            </a:r>
+            <a:r>
+              <a:rPr lang="nl-NL" dirty="0" err="1"/>
+              <a:t>flees</a:t>
+            </a:r>
+            <a:r>
+              <a:rPr lang="nl-NL" dirty="0"/>
+              <a:t> </a:t>
+            </a:r>
+            <a:r>
+              <a:rPr lang="nl-NL" dirty="0" err="1"/>
+              <a:t>away</a:t>
+            </a:r>
+            <a:r>
+              <a:rPr lang="nl-NL" dirty="0"/>
+              <a:t> </a:t>
+            </a:r>
+            <a:r>
+              <a:rPr lang="nl-NL" dirty="0" err="1"/>
+              <a:t>from</a:t>
             </a:r>
             <a:r>
               <a:rPr lang="nl-NL"/>
-              <a:t>it.</a:t>
-            </a:r>
+              <a:t> it.</a:t>
+            </a:r>
+          </a:p>
+          <a:p>
+            <a:pPr marL="0" indent="0">
+              <a:buFont typeface="Arial" panose="020B0604020202020204" pitchFamily="34" charset="0"/>
+              <a:buNone/>
+            </a:pPr>
             <a:endParaRPr lang="nl-NL" dirty="0"/>
+          </a:p>
+          <a:p>
+            <a:pPr marL="0" indent="0">
+              <a:buFont typeface="Arial" panose="020B0604020202020204" pitchFamily="34" charset="0"/>
+              <a:buNone/>
+            </a:pPr>
+            <a:endParaRPr lang="en-BE" dirty="0"/>
           </a:p>
         </p:txBody>
       </p:sp>
@@ -4696,109 +5232,6 @@
     <p:extLst>
       <p:ext uri="{BB962C8B-B14F-4D97-AF65-F5344CB8AC3E}">
         <p14:creationId xmlns:p14="http://schemas.microsoft.com/office/powerpoint/2010/main" val="1652142467"/>
-      </p:ext>
-    </p:extLst>
-  </p:cSld>
-  <p:clrMapOvr>
-    <a:masterClrMapping/>
-  </p:clrMapOvr>
-</p:sld>
-</file>
-
-<file path=ppt/slides/slide7.xml><?xml version="1.0" encoding="utf-8"?>
-<p:sld xmlns:a="http://schemas.openxmlformats.org/drawingml/2006/main" xmlns:r="http://schemas.openxmlformats.org/officeDocument/2006/relationships" xmlns:p="http://schemas.openxmlformats.org/presentationml/2006/main">
-  <p:cSld>
-    <p:spTree>
-      <p:nvGrpSpPr>
-        <p:cNvPr id="1" name=""/>
-        <p:cNvGrpSpPr/>
-        <p:nvPr/>
-      </p:nvGrpSpPr>
-      <p:grpSpPr>
-        <a:xfrm>
-          <a:off x="0" y="0"/>
-          <a:ext cx="0" cy="0"/>
-          <a:chOff x="0" y="0"/>
-          <a:chExt cx="0" cy="0"/>
-        </a:xfrm>
-      </p:grpSpPr>
-      <p:sp>
-        <p:nvSpPr>
-          <p:cNvPr id="2" name="Title 1">
-            <a:extLst>
-              <a:ext uri="{FF2B5EF4-FFF2-40B4-BE49-F238E27FC236}">
-                <a16:creationId xmlns:a16="http://schemas.microsoft.com/office/drawing/2014/main" id="{EF6BB071-C63E-40D3-93C6-9F99F27862FE}"/>
-              </a:ext>
-            </a:extLst>
-          </p:cNvPr>
-          <p:cNvSpPr>
-            <a:spLocks noGrp="1"/>
-          </p:cNvSpPr>
-          <p:nvPr>
-            <p:ph type="title"/>
-          </p:nvPr>
-        </p:nvSpPr>
-        <p:spPr/>
-        <p:txBody>
-          <a:bodyPr/>
-          <a:lstStyle/>
-          <a:p>
-            <a:r>
-              <a:rPr lang="en-US"/>
-              <a:t>High Score</a:t>
-            </a:r>
-            <a:endParaRPr lang="en-BE"/>
-          </a:p>
-        </p:txBody>
-      </p:sp>
-      <p:sp>
-        <p:nvSpPr>
-          <p:cNvPr id="3" name="Content Placeholder 2">
-            <a:extLst>
-              <a:ext uri="{FF2B5EF4-FFF2-40B4-BE49-F238E27FC236}">
-                <a16:creationId xmlns:a16="http://schemas.microsoft.com/office/drawing/2014/main" id="{64915428-ACD8-4B22-96DC-2806680ED3AB}"/>
-              </a:ext>
-            </a:extLst>
-          </p:cNvPr>
-          <p:cNvSpPr>
-            <a:spLocks noGrp="1"/>
-          </p:cNvSpPr>
-          <p:nvPr>
-            <p:ph idx="1"/>
-          </p:nvPr>
-        </p:nvSpPr>
-        <p:spPr/>
-        <p:txBody>
-          <a:bodyPr/>
-          <a:lstStyle/>
-          <a:p>
-            <a:pPr marL="0" indent="0">
-              <a:buNone/>
-            </a:pPr>
-            <a:r>
-              <a:rPr lang="en-US">
-                <a:solidFill>
-                  <a:schemeClr val="bg1">
-                    <a:lumMod val="75000"/>
-                  </a:schemeClr>
-                </a:solidFill>
-              </a:rPr>
-              <a:t>Screen shot or list of highest scores</a:t>
-            </a:r>
-            <a:endParaRPr lang="en-BE">
-              <a:solidFill>
-                <a:schemeClr val="bg1">
-                  <a:lumMod val="75000"/>
-                </a:schemeClr>
-              </a:solidFill>
-            </a:endParaRPr>
-          </a:p>
-        </p:txBody>
-      </p:sp>
-    </p:spTree>
-    <p:extLst>
-      <p:ext uri="{BB962C8B-B14F-4D97-AF65-F5344CB8AC3E}">
-        <p14:creationId xmlns:p14="http://schemas.microsoft.com/office/powerpoint/2010/main" val="3423734040"/>
       </p:ext>
     </p:extLst>
   </p:cSld>
@@ -5419,18 +5852,12 @@
 </file>
 
 <file path=customXml/item1.xml><?xml version="1.0" encoding="utf-8"?>
-<p:properties xmlns:p="http://schemas.microsoft.com/office/2006/metadata/properties" xmlns:xsi="http://www.w3.org/2001/XMLSchema-instance" xmlns:pc="http://schemas.microsoft.com/office/infopath/2007/PartnerControls">
-  <documentManagement>
-    <IconOverlay xmlns="http://schemas.microsoft.com/sharepoint/v4" xsi:nil="true"/>
-    <TaxCatchAll xmlns="128482ec-0431-40d5-ab26-89ea2a4f3ccd" xsi:nil="true"/>
-    <m99485b88215436a82099f8287cba0b0 xmlns="128482ec-0431-40d5-ab26-89ea2a4f3ccd">
-      <Terms xmlns="http://schemas.microsoft.com/office/infopath/2007/PartnerControls"/>
-    </m99485b88215436a82099f8287cba0b0>
-    <lcf76f155ced4ddcb4097134ff3c332f xmlns="60eb0cf4-ae2a-4762-800a-cb593b869ecb">
-      <Terms xmlns="http://schemas.microsoft.com/office/infopath/2007/PartnerControls"/>
-    </lcf76f155ced4ddcb4097134ff3c332f>
-  </documentManagement>
-</p:properties>
+<?mso-contentType ?>
+<FormTemplates xmlns="http://schemas.microsoft.com/sharepoint/v3/contenttype/forms">
+  <Display>DocumentLibraryForm</Display>
+  <Edit>DocumentLibraryForm</Edit>
+  <New>DocumentLibraryForm</New>
+</FormTemplates>
 </file>
 
 <file path=customXml/item2.xml><?xml version="1.0" encoding="utf-8"?>
@@ -5707,22 +6134,24 @@
 </file>
 
 <file path=customXml/item3.xml><?xml version="1.0" encoding="utf-8"?>
-<?mso-contentType ?>
-<FormTemplates xmlns="http://schemas.microsoft.com/sharepoint/v3/contenttype/forms">
-  <Display>DocumentLibraryForm</Display>
-  <Edit>DocumentLibraryForm</Edit>
-  <New>DocumentLibraryForm</New>
-</FormTemplates>
+<p:properties xmlns:p="http://schemas.microsoft.com/office/2006/metadata/properties" xmlns:xsi="http://www.w3.org/2001/XMLSchema-instance" xmlns:pc="http://schemas.microsoft.com/office/infopath/2007/PartnerControls">
+  <documentManagement>
+    <IconOverlay xmlns="http://schemas.microsoft.com/sharepoint/v4" xsi:nil="true"/>
+    <TaxCatchAll xmlns="128482ec-0431-40d5-ab26-89ea2a4f3ccd" xsi:nil="true"/>
+    <m99485b88215436a82099f8287cba0b0 xmlns="128482ec-0431-40d5-ab26-89ea2a4f3ccd">
+      <Terms xmlns="http://schemas.microsoft.com/office/infopath/2007/PartnerControls"/>
+    </m99485b88215436a82099f8287cba0b0>
+    <lcf76f155ced4ddcb4097134ff3c332f xmlns="60eb0cf4-ae2a-4762-800a-cb593b869ecb">
+      <Terms xmlns="http://schemas.microsoft.com/office/infopath/2007/PartnerControls"/>
+    </lcf76f155ced4ddcb4097134ff3c332f>
+  </documentManagement>
+</p:properties>
 </file>
 
 <file path=customXml/itemProps1.xml><?xml version="1.0" encoding="utf-8"?>
-<ds:datastoreItem xmlns:ds="http://schemas.openxmlformats.org/officeDocument/2006/customXml" ds:itemID="{B743389A-7EE0-4951-8919-E91DD69E3687}">
+<ds:datastoreItem xmlns:ds="http://schemas.openxmlformats.org/officeDocument/2006/customXml" ds:itemID="{AF8EC6D1-CB19-4400-AD0A-0C75CD884AEA}">
   <ds:schemaRefs>
-    <ds:schemaRef ds:uri="128482ec-0431-40d5-ab26-89ea2a4f3ccd"/>
-    <ds:schemaRef ds:uri="http://schemas.microsoft.com/office/2006/metadata/properties"/>
-    <ds:schemaRef ds:uri="http://schemas.microsoft.com/office/infopath/2007/PartnerControls"/>
-    <ds:schemaRef ds:uri="http://schemas.microsoft.com/sharepoint/v4"/>
-    <ds:schemaRef ds:uri="60eb0cf4-ae2a-4762-800a-cb593b869ecb"/>
+    <ds:schemaRef ds:uri="http://schemas.microsoft.com/sharepoint/v3/contenttype/forms"/>
   </ds:schemaRefs>
 </ds:datastoreItem>
 </file>
@@ -5749,9 +6178,13 @@
 </file>
 
 <file path=customXml/itemProps3.xml><?xml version="1.0" encoding="utf-8"?>
-<ds:datastoreItem xmlns:ds="http://schemas.openxmlformats.org/officeDocument/2006/customXml" ds:itemID="{AF8EC6D1-CB19-4400-AD0A-0C75CD884AEA}">
+<ds:datastoreItem xmlns:ds="http://schemas.openxmlformats.org/officeDocument/2006/customXml" ds:itemID="{B743389A-7EE0-4951-8919-E91DD69E3687}">
   <ds:schemaRefs>
-    <ds:schemaRef ds:uri="http://schemas.microsoft.com/sharepoint/v3/contenttype/forms"/>
+    <ds:schemaRef ds:uri="128482ec-0431-40d5-ab26-89ea2a4f3ccd"/>
+    <ds:schemaRef ds:uri="http://schemas.microsoft.com/office/2006/metadata/properties"/>
+    <ds:schemaRef ds:uri="http://schemas.microsoft.com/office/infopath/2007/PartnerControls"/>
+    <ds:schemaRef ds:uri="http://schemas.microsoft.com/sharepoint/v4"/>
+    <ds:schemaRef ds:uri="60eb0cf4-ae2a-4762-800a-cb593b869ecb"/>
   </ds:schemaRefs>
 </ds:datastoreItem>
 </file>
--- a/GPP_ZombieAI_DelieWout_2DAE19.pptx
+++ b/GPP_ZombieAI_DelieWout_2DAE19.pptx
@@ -5208,7 +5208,7 @@
               <a:t>from</a:t>
             </a:r>
             <a:r>
-              <a:rPr lang="nl-NL"/>
+              <a:rPr lang="nl-NL" dirty="0"/>
               <a:t> it.</a:t>
             </a:r>
           </a:p>
